--- a/Challenge 2/Pitch-Team-10-challenge2.pptx
+++ b/Challenge 2/Pitch-Team-10-challenge2.pptx
@@ -4181,13 +4181,13 @@
   <p:clrMapOvr>
     <a:masterClrMapping/>
   </p:clrMapOvr>
-  <mc:AlternateContent xmlns:mc="http://schemas.openxmlformats.org/markup-compatibility/2006">
-    <mc:Choice xmlns:p159="http://schemas.microsoft.com/office/powerpoint/2015/09/main" Requires="p159">
+  <mc:AlternateContent xmlns:mc="http://schemas.openxmlformats.org/markup-compatibility/2006" xmlns:p159="http://schemas.microsoft.com/office/powerpoint/2015/09/main">
+    <mc:Choice Requires="p159">
       <p:transition xmlns:p14="http://schemas.microsoft.com/office/powerpoint/2010/main" spd="slow" p14:dur="2000">
         <p159:morph option="byObject"/>
       </p:transition>
     </mc:Choice>
-    <mc:Fallback>
+    <mc:Fallback xmlns="">
       <p:transition spd="slow">
         <p:fade/>
       </p:transition>
@@ -4837,13 +4837,13 @@
   <p:clrMapOvr>
     <a:masterClrMapping/>
   </p:clrMapOvr>
-  <mc:AlternateContent xmlns:mc="http://schemas.openxmlformats.org/markup-compatibility/2006">
-    <mc:Choice xmlns:p159="http://schemas.microsoft.com/office/powerpoint/2015/09/main" Requires="p159">
+  <mc:AlternateContent xmlns:mc="http://schemas.openxmlformats.org/markup-compatibility/2006" xmlns:p159="http://schemas.microsoft.com/office/powerpoint/2015/09/main">
+    <mc:Choice Requires="p159">
       <p:transition xmlns:p14="http://schemas.microsoft.com/office/powerpoint/2010/main" spd="slow" p14:dur="2000">
         <p159:morph option="byObject"/>
       </p:transition>
     </mc:Choice>
-    <mc:Fallback>
+    <mc:Fallback xmlns="">
       <p:transition spd="slow">
         <p:fade/>
       </p:transition>
@@ -4885,8 +4885,8 @@
         </p:nvSpPr>
         <p:spPr>
           <a:xfrm>
-            <a:off x="666750" y="3390900"/>
-            <a:ext cx="16325850" cy="6308009"/>
+            <a:off x="700190" y="2457690"/>
+            <a:ext cx="16325850" cy="7795596"/>
           </a:xfrm>
           <a:prstGeom prst="rect">
             <a:avLst/>
@@ -4913,10 +4913,19 @@
                 <a:cs typeface="TT Fors"/>
                 <a:sym typeface="TT Fors"/>
               </a:rPr>
-              <a:t>That </a:t>
-            </a:r>
-            <a:r>
-              <a:rPr lang="en-US" sz="2047" dirty="0" err="1">
+              <a:t>That integrates:</a:t>
+            </a:r>
+          </a:p>
+          <a:p>
+            <a:pPr marL="342900" lvl="0" indent="-342900" algn="l">
+              <a:lnSpc>
+                <a:spcPts val="2866"/>
+              </a:lnSpc>
+              <a:buFont typeface="Arial" panose="020B0604020202020204" pitchFamily="34" charset="0"/>
+              <a:buChar char="•"/>
+            </a:pPr>
+            <a:r>
+              <a:rPr lang="en-US" sz="2047" b="1" dirty="0">
                 <a:solidFill>
                   <a:srgbClr val="C5E9F6"/>
                 </a:solidFill>
@@ -4925,7 +4934,7 @@
                 <a:cs typeface="TT Fors"/>
                 <a:sym typeface="TT Fors"/>
               </a:rPr>
-              <a:t>integragrates</a:t>
+              <a:t>Trained EPSS-based risk prediction</a:t>
             </a:r>
             <a:r>
               <a:rPr lang="en-US" sz="2047" dirty="0">
@@ -4937,40 +4946,7 @@
                 <a:cs typeface="TT Fors"/>
                 <a:sym typeface="TT Fors"/>
               </a:rPr>
-              <a:t>:</a:t>
-            </a:r>
-          </a:p>
-          <a:p>
-            <a:pPr marL="342900" lvl="0" indent="-342900" algn="l">
-              <a:lnSpc>
-                <a:spcPts val="2866"/>
-              </a:lnSpc>
-              <a:buFont typeface="Arial" panose="020B0604020202020204" pitchFamily="34" charset="0"/>
-              <a:buChar char="•"/>
-            </a:pPr>
-            <a:r>
-              <a:rPr lang="en-US" sz="2047" b="1" dirty="0">
-                <a:solidFill>
-                  <a:srgbClr val="C5E9F6"/>
-                </a:solidFill>
-                <a:latin typeface="TT Fors"/>
-                <a:ea typeface="TT Fors"/>
-                <a:cs typeface="TT Fors"/>
-                <a:sym typeface="TT Fors"/>
-              </a:rPr>
-              <a:t>EPSS-based risk prediction</a:t>
-            </a:r>
-            <a:r>
-              <a:rPr lang="en-US" sz="2047" dirty="0">
-                <a:solidFill>
-                  <a:srgbClr val="C5E9F6"/>
-                </a:solidFill>
-                <a:latin typeface="TT Fors"/>
-                <a:ea typeface="TT Fors"/>
-                <a:cs typeface="TT Fors"/>
-                <a:sym typeface="TT Fors"/>
-              </a:rPr>
-              <a:t>, capturing the real likelihood of exploitation</a:t>
+              <a:t>, estimating the real-world likelihood of vulnerability exploitation</a:t>
             </a:r>
           </a:p>
           <a:p>
@@ -5139,6 +5115,25 @@
               </a:lnSpc>
             </a:pPr>
             <a:r>
+              <a:rPr lang="en-US" sz="2047" b="1" dirty="0">
+                <a:solidFill>
+                  <a:srgbClr val="C5E9F6"/>
+                </a:solidFill>
+                <a:latin typeface="TT Fors"/>
+                <a:ea typeface="TT Fors"/>
+                <a:cs typeface="TT Fors"/>
+                <a:sym typeface="TT Fors"/>
+              </a:rPr>
+              <a:t>Instead of asking:</a:t>
+            </a:r>
+          </a:p>
+          <a:p>
+            <a:pPr marL="0" lvl="0" indent="0" algn="l">
+              <a:lnSpc>
+                <a:spcPts val="2866"/>
+              </a:lnSpc>
+            </a:pPr>
+            <a:r>
               <a:rPr lang="en-US" sz="2047" dirty="0">
                 <a:solidFill>
                   <a:srgbClr val="C5E9F6"/>
@@ -5148,7 +5143,7 @@
                 <a:cs typeface="TT Fors"/>
                 <a:sym typeface="TT Fors"/>
               </a:rPr>
-              <a:t>Instead of asking “</a:t>
+              <a:t>“</a:t>
             </a:r>
             <a:r>
               <a:rPr lang="en-US" sz="2047" i="1" dirty="0">
@@ -5172,50 +5167,7 @@
                 <a:cs typeface="TT Fors"/>
                 <a:sym typeface="TT Fors"/>
               </a:rPr>
-              <a:t>”, our system answers:</a:t>
-            </a:r>
-          </a:p>
-          <a:p>
-            <a:pPr marL="0" lvl="0" indent="0" algn="l">
-              <a:lnSpc>
-                <a:spcPts val="2866"/>
-              </a:lnSpc>
-            </a:pPr>
-            <a:r>
-              <a:rPr lang="en-US" sz="2047" dirty="0">
-                <a:solidFill>
-                  <a:srgbClr val="C5E9F6"/>
-                </a:solidFill>
-                <a:latin typeface="TT Fors"/>
-                <a:ea typeface="TT Fors"/>
-                <a:cs typeface="TT Fors"/>
-                <a:sym typeface="TT Fors"/>
-              </a:rPr>
-              <a:t>“</a:t>
-            </a:r>
-            <a:r>
-              <a:rPr lang="en-US" sz="2047" b="1" dirty="0">
-                <a:solidFill>
-                  <a:srgbClr val="C5E9F6"/>
-                </a:solidFill>
-                <a:latin typeface="TT Fors"/>
-                <a:ea typeface="TT Fors"/>
-                <a:cs typeface="TT Fors"/>
-                <a:sym typeface="TT Fors"/>
-              </a:rPr>
-              <a:t>What is the best patching plan, given risk, constraints, and limited resources</a:t>
-            </a:r>
-            <a:r>
-              <a:rPr lang="en-US" sz="2047" dirty="0">
-                <a:solidFill>
-                  <a:srgbClr val="C5E9F6"/>
-                </a:solidFill>
-                <a:latin typeface="TT Fors"/>
-                <a:ea typeface="TT Fors"/>
-                <a:cs typeface="TT Fors"/>
-                <a:sym typeface="TT Fors"/>
-              </a:rPr>
-              <a:t>?”</a:t>
+              <a:t>”</a:t>
             </a:r>
           </a:p>
           <a:p>
@@ -5241,6 +5193,25 @@
               </a:lnSpc>
             </a:pPr>
             <a:r>
+              <a:rPr lang="en-US" sz="2047" b="1" dirty="0">
+                <a:solidFill>
+                  <a:srgbClr val="C5E9F6"/>
+                </a:solidFill>
+                <a:latin typeface="TT Fors"/>
+                <a:ea typeface="TT Fors"/>
+                <a:cs typeface="TT Fors"/>
+                <a:sym typeface="TT Fors"/>
+              </a:rPr>
+              <a:t>Our system answers:</a:t>
+            </a:r>
+          </a:p>
+          <a:p>
+            <a:pPr marL="0" lvl="0" indent="0" algn="l">
+              <a:lnSpc>
+                <a:spcPts val="2866"/>
+              </a:lnSpc>
+            </a:pPr>
+            <a:r>
               <a:rPr lang="en-US" sz="2047" dirty="0">
                 <a:solidFill>
                   <a:srgbClr val="C5E9F6"/>
@@ -5250,17 +5221,32 @@
                 <a:cs typeface="TT Fors"/>
                 <a:sym typeface="TT Fors"/>
               </a:rPr>
-              <a:t>The result is:</a:t>
-            </a:r>
-          </a:p>
-          <a:p>
-            <a:pPr marL="342900" lvl="0" indent="-342900" algn="l">
-              <a:lnSpc>
-                <a:spcPts val="2866"/>
-              </a:lnSpc>
-              <a:buFont typeface="Arial" panose="020B0604020202020204" pitchFamily="34" charset="0"/>
-              <a:buChar char="•"/>
-            </a:pPr>
+              <a:t>“</a:t>
+            </a:r>
+            <a:r>
+              <a:rPr lang="en-US" sz="2047" b="1" i="1" dirty="0">
+                <a:solidFill>
+                  <a:srgbClr val="C5E9F6"/>
+                </a:solidFill>
+                <a:latin typeface="TT Fors"/>
+                <a:ea typeface="TT Fors"/>
+                <a:cs typeface="TT Fors"/>
+                <a:sym typeface="TT Fors"/>
+              </a:rPr>
+              <a:t>What is the best patching plan, given risk, constraints, and limited resources</a:t>
+            </a:r>
+            <a:r>
+              <a:rPr lang="en-US" sz="2047" i="1" dirty="0">
+                <a:solidFill>
+                  <a:srgbClr val="C5E9F6"/>
+                </a:solidFill>
+                <a:latin typeface="TT Fors"/>
+                <a:ea typeface="TT Fors"/>
+                <a:cs typeface="TT Fors"/>
+                <a:sym typeface="TT Fors"/>
+              </a:rPr>
+              <a:t>?</a:t>
+            </a:r>
             <a:r>
               <a:rPr lang="en-US" sz="2047" dirty="0">
                 <a:solidFill>
@@ -5271,49 +5257,7 @@
                 <a:cs typeface="TT Fors"/>
                 <a:sym typeface="TT Fors"/>
               </a:rPr>
-              <a:t>Reduced exposure to high-risk vulnerabilities</a:t>
-            </a:r>
-          </a:p>
-          <a:p>
-            <a:pPr marL="342900" lvl="0" indent="-342900" algn="l">
-              <a:lnSpc>
-                <a:spcPts val="2866"/>
-              </a:lnSpc>
-              <a:buFont typeface="Arial" panose="020B0604020202020204" pitchFamily="34" charset="0"/>
-              <a:buChar char="•"/>
-            </a:pPr>
-            <a:r>
-              <a:rPr lang="en-US" sz="2047" dirty="0">
-                <a:solidFill>
-                  <a:srgbClr val="C5E9F6"/>
-                </a:solidFill>
-                <a:latin typeface="TT Fors"/>
-                <a:ea typeface="TT Fors"/>
-                <a:cs typeface="TT Fors"/>
-                <a:sym typeface="TT Fors"/>
-              </a:rPr>
-              <a:t>Better use of operational capacity</a:t>
-            </a:r>
-          </a:p>
-          <a:p>
-            <a:pPr marL="342900" lvl="0" indent="-342900" algn="l">
-              <a:lnSpc>
-                <a:spcPts val="2866"/>
-              </a:lnSpc>
-              <a:buFont typeface="Arial" panose="020B0604020202020204" pitchFamily="34" charset="0"/>
-              <a:buChar char="•"/>
-            </a:pPr>
-            <a:r>
-              <a:rPr lang="en-US" sz="2047" dirty="0">
-                <a:solidFill>
-                  <a:srgbClr val="C5E9F6"/>
-                </a:solidFill>
-                <a:latin typeface="TT Fors"/>
-                <a:ea typeface="TT Fors"/>
-                <a:cs typeface="TT Fors"/>
-                <a:sym typeface="TT Fors"/>
-              </a:rPr>
-              <a:t>Transparent and explainable scheduling decisions</a:t>
+              <a:t>”</a:t>
             </a:r>
           </a:p>
           <a:p>
@@ -5339,6 +5283,135 @@
               </a:lnSpc>
             </a:pPr>
             <a:r>
+              <a:rPr lang="en-US" sz="2047" b="1" dirty="0">
+                <a:solidFill>
+                  <a:srgbClr val="C5E9F6"/>
+                </a:solidFill>
+                <a:latin typeface="TT Fors"/>
+                <a:ea typeface="TT Fors"/>
+                <a:cs typeface="TT Fors"/>
+                <a:sym typeface="TT Fors"/>
+              </a:rPr>
+              <a:t>The result</a:t>
+            </a:r>
+            <a:r>
+              <a:rPr lang="en-US" sz="2047" dirty="0">
+                <a:solidFill>
+                  <a:srgbClr val="C5E9F6"/>
+                </a:solidFill>
+                <a:latin typeface="TT Fors"/>
+                <a:ea typeface="TT Fors"/>
+                <a:cs typeface="TT Fors"/>
+                <a:sym typeface="TT Fors"/>
+              </a:rPr>
+              <a:t>:</a:t>
+            </a:r>
+          </a:p>
+          <a:p>
+            <a:pPr marL="342900" lvl="0" indent="-342900" algn="l">
+              <a:lnSpc>
+                <a:spcPts val="2866"/>
+              </a:lnSpc>
+              <a:buFont typeface="Arial" panose="020B0604020202020204" pitchFamily="34" charset="0"/>
+              <a:buChar char="•"/>
+            </a:pPr>
+            <a:r>
+              <a:rPr lang="en-US" sz="2047" dirty="0">
+                <a:solidFill>
+                  <a:srgbClr val="C5E9F6"/>
+                </a:solidFill>
+                <a:latin typeface="TT Fors"/>
+                <a:ea typeface="TT Fors"/>
+                <a:cs typeface="TT Fors"/>
+                <a:sym typeface="TT Fors"/>
+              </a:rPr>
+              <a:t>Reduced exposure to high-risk vulnerabilities</a:t>
+            </a:r>
+          </a:p>
+          <a:p>
+            <a:pPr marL="342900" lvl="0" indent="-342900" algn="l">
+              <a:lnSpc>
+                <a:spcPts val="2866"/>
+              </a:lnSpc>
+              <a:buFont typeface="Arial" panose="020B0604020202020204" pitchFamily="34" charset="0"/>
+              <a:buChar char="•"/>
+            </a:pPr>
+            <a:r>
+              <a:rPr lang="en-US" sz="2047" dirty="0">
+                <a:solidFill>
+                  <a:srgbClr val="C5E9F6"/>
+                </a:solidFill>
+                <a:latin typeface="TT Fors"/>
+                <a:ea typeface="TT Fors"/>
+                <a:cs typeface="TT Fors"/>
+                <a:sym typeface="TT Fors"/>
+              </a:rPr>
+              <a:t>Better use of operational capacity</a:t>
+            </a:r>
+          </a:p>
+          <a:p>
+            <a:pPr marL="342900" lvl="0" indent="-342900" algn="l">
+              <a:lnSpc>
+                <a:spcPts val="2866"/>
+              </a:lnSpc>
+              <a:buFont typeface="Arial" panose="020B0604020202020204" pitchFamily="34" charset="0"/>
+              <a:buChar char="•"/>
+            </a:pPr>
+            <a:r>
+              <a:rPr lang="en-US" sz="2047" dirty="0">
+                <a:solidFill>
+                  <a:srgbClr val="C5E9F6"/>
+                </a:solidFill>
+                <a:latin typeface="TT Fors"/>
+                <a:ea typeface="TT Fors"/>
+                <a:cs typeface="TT Fors"/>
+                <a:sym typeface="TT Fors"/>
+              </a:rPr>
+              <a:t>Transparent and explainable scheduling decisions</a:t>
+            </a:r>
+          </a:p>
+          <a:p>
+            <a:pPr marL="0" lvl="0" indent="0" algn="l">
+              <a:lnSpc>
+                <a:spcPts val="2866"/>
+              </a:lnSpc>
+            </a:pPr>
+            <a:endParaRPr lang="en-US" sz="2047" dirty="0">
+              <a:solidFill>
+                <a:srgbClr val="C5E9F6"/>
+              </a:solidFill>
+              <a:latin typeface="TT Fors"/>
+              <a:ea typeface="TT Fors"/>
+              <a:cs typeface="TT Fors"/>
+              <a:sym typeface="TT Fors"/>
+            </a:endParaRPr>
+          </a:p>
+          <a:p>
+            <a:pPr marL="0" lvl="0" indent="0" algn="l">
+              <a:lnSpc>
+                <a:spcPts val="2866"/>
+              </a:lnSpc>
+            </a:pPr>
+            <a:r>
+              <a:rPr lang="en-US" sz="2047" b="1" dirty="0">
+                <a:solidFill>
+                  <a:srgbClr val="C5E9F6"/>
+                </a:solidFill>
+                <a:latin typeface="TT Fors"/>
+                <a:ea typeface="TT Fors"/>
+                <a:cs typeface="TT Fors"/>
+                <a:sym typeface="TT Fors"/>
+              </a:rPr>
+              <a:t>Impact</a:t>
+            </a:r>
+          </a:p>
+          <a:p>
+            <a:pPr marL="0" lvl="0" indent="0" algn="l">
+              <a:lnSpc>
+                <a:spcPts val="2866"/>
+              </a:lnSpc>
+            </a:pPr>
+            <a:r>
               <a:rPr lang="en-US" sz="2047" dirty="0">
                 <a:solidFill>
                   <a:srgbClr val="C5E9F6"/>
@@ -5362,9 +5435,9 @@
         <p:grpSpPr>
           <a:xfrm>
             <a:off x="666750" y="659606"/>
-            <a:ext cx="11201400" cy="2172076"/>
+            <a:ext cx="11201400" cy="1697288"/>
             <a:chOff x="0" y="-9525"/>
-            <a:chExt cx="14935200" cy="2896101"/>
+            <a:chExt cx="14935200" cy="2263050"/>
           </a:xfrm>
         </p:grpSpPr>
         <p:sp>
@@ -5419,7 +5492,7 @@
           </p:nvSpPr>
           <p:spPr>
             <a:xfrm>
-              <a:off x="0" y="2235200"/>
+              <a:off x="0" y="1602149"/>
               <a:ext cx="13423900" cy="651376"/>
             </a:xfrm>
             <a:prstGeom prst="rect">
@@ -5650,13 +5723,13 @@
   <p:clrMapOvr>
     <a:masterClrMapping/>
   </p:clrMapOvr>
-  <mc:AlternateContent xmlns:mc="http://schemas.openxmlformats.org/markup-compatibility/2006">
-    <mc:Choice xmlns:p159="http://schemas.microsoft.com/office/powerpoint/2015/09/main" Requires="p159">
+  <mc:AlternateContent xmlns:mc="http://schemas.openxmlformats.org/markup-compatibility/2006" xmlns:p159="http://schemas.microsoft.com/office/powerpoint/2015/09/main">
+    <mc:Choice Requires="p159">
       <p:transition xmlns:p14="http://schemas.microsoft.com/office/powerpoint/2010/main" spd="slow" p14:dur="2000">
         <p159:morph option="byObject"/>
       </p:transition>
     </mc:Choice>
-    <mc:Fallback>
+    <mc:Fallback xmlns="">
       <p:transition spd="slow">
         <p:fade/>
       </p:transition>
@@ -7944,13 +8017,13 @@
   <p:clrMapOvr>
     <a:masterClrMapping/>
   </p:clrMapOvr>
-  <mc:AlternateContent xmlns:mc="http://schemas.openxmlformats.org/markup-compatibility/2006">
-    <mc:Choice xmlns:p159="http://schemas.microsoft.com/office/powerpoint/2015/09/main" Requires="p159">
+  <mc:AlternateContent xmlns:mc="http://schemas.openxmlformats.org/markup-compatibility/2006" xmlns:p159="http://schemas.microsoft.com/office/powerpoint/2015/09/main">
+    <mc:Choice Requires="p159">
       <p:transition xmlns:p14="http://schemas.microsoft.com/office/powerpoint/2010/main" spd="slow" p14:dur="2000">
         <p159:morph option="byObject"/>
       </p:transition>
     </mc:Choice>
-    <mc:Fallback>
+    <mc:Fallback xmlns="">
       <p:transition spd="slow">
         <p:fade/>
       </p:transition>
@@ -8367,13 +8440,13 @@
   <p:clrMapOvr>
     <a:masterClrMapping/>
   </p:clrMapOvr>
-  <mc:AlternateContent xmlns:mc="http://schemas.openxmlformats.org/markup-compatibility/2006">
-    <mc:Choice xmlns:p159="http://schemas.microsoft.com/office/powerpoint/2015/09/main" Requires="p159">
+  <mc:AlternateContent xmlns:mc="http://schemas.openxmlformats.org/markup-compatibility/2006" xmlns:p159="http://schemas.microsoft.com/office/powerpoint/2015/09/main">
+    <mc:Choice Requires="p159">
       <p:transition xmlns:p14="http://schemas.microsoft.com/office/powerpoint/2010/main" spd="slow" p14:dur="2000">
         <p159:morph option="byObject"/>
       </p:transition>
     </mc:Choice>
-    <mc:Fallback>
+    <mc:Fallback xmlns="">
       <p:transition spd="slow">
         <p:fade/>
       </p:transition>
